--- a/python_course/chapter_09_file_io/presentation.pptx
+++ b/python_course/chapter_09_file_io/presentation.pptx
@@ -19,7 +19,7 @@
     <p:sldId id="267" r:id="rId18"/>
     <p:sldId id="268" r:id="rId19"/>
   </p:sldIdLst>
-  <p:sldSz cx="9144000" cy="6858000" type="screen4x3"/>
+  <p:sldSz cx="12191695" cy="6858000" type="screen4x3"/>
   <p:notesSz cx="6858000" cy="9144000"/>
   <p:defaultTextStyle>
     <a:defPPr>
@@ -3109,7 +3109,7 @@
         <p:spPr>
           <a:xfrm>
             <a:off x="0" y="0"/>
-            <a:ext cx="9144000" cy="6858000"/>
+            <a:ext cx="12191695" cy="6858000"/>
           </a:xfrm>
           <a:prstGeom prst="rect">
             <a:avLst/>
@@ -3151,8 +3151,8 @@
         </p:nvSpPr>
         <p:spPr>
           <a:xfrm>
-            <a:off x="914400" y="2286000"/>
-            <a:ext cx="7315200" cy="914400"/>
+            <a:off x="914400" y="1828800"/>
+            <a:ext cx="10360152" cy="1371600"/>
           </a:xfrm>
           <a:prstGeom prst="rect">
             <a:avLst/>
@@ -3186,8 +3186,8 @@
         </p:nvSpPr>
         <p:spPr>
           <a:xfrm>
-            <a:off x="914400" y="3474720"/>
-            <a:ext cx="7315200" cy="548640"/>
+            <a:off x="914400" y="3657600"/>
+            <a:ext cx="10360152" cy="548640"/>
           </a:xfrm>
           <a:prstGeom prst="rect">
             <a:avLst/>
@@ -3221,8 +3221,8 @@
         </p:nvSpPr>
         <p:spPr>
           <a:xfrm>
-            <a:off x="914400" y="4114800"/>
-            <a:ext cx="7315200" cy="548640"/>
+            <a:off x="914400" y="4297680"/>
+            <a:ext cx="10360152" cy="548640"/>
           </a:xfrm>
           <a:prstGeom prst="rect">
             <a:avLst/>
@@ -3275,7 +3275,7 @@
         <p:spPr>
           <a:xfrm>
             <a:off x="0" y="0"/>
-            <a:ext cx="9144000" cy="6858000"/>
+            <a:ext cx="12191695" cy="6858000"/>
           </a:xfrm>
           <a:prstGeom prst="rect">
             <a:avLst/>
@@ -3318,7 +3318,7 @@
         <p:spPr>
           <a:xfrm>
             <a:off x="0" y="0"/>
-            <a:ext cx="9144000" cy="137160"/>
+            <a:ext cx="12191695" cy="137160"/>
           </a:xfrm>
           <a:prstGeom prst="rect">
             <a:avLst/>
@@ -3361,7 +3361,7 @@
         <p:spPr>
           <a:xfrm>
             <a:off x="457200" y="365760"/>
-            <a:ext cx="8229600" cy="731520"/>
+            <a:ext cx="10972800" cy="731520"/>
           </a:xfrm>
           <a:prstGeom prst="rect">
             <a:avLst/>
@@ -3439,7 +3439,7 @@
         <p:spPr>
           <a:xfrm>
             <a:off x="640080" y="1371600"/>
-            <a:ext cx="7863840" cy="3657600"/>
+            <a:ext cx="10789920" cy="4572000"/>
           </a:xfrm>
           <a:prstGeom prst="rect">
             <a:avLst/>
@@ -3525,7 +3525,7 @@
         <p:spPr>
           <a:xfrm>
             <a:off x="0" y="0"/>
-            <a:ext cx="9144000" cy="6858000"/>
+            <a:ext cx="12191695" cy="6858000"/>
           </a:xfrm>
           <a:prstGeom prst="rect">
             <a:avLst/>
@@ -3568,7 +3568,7 @@
         <p:spPr>
           <a:xfrm>
             <a:off x="0" y="0"/>
-            <a:ext cx="9144000" cy="137160"/>
+            <a:ext cx="12191695" cy="137160"/>
           </a:xfrm>
           <a:prstGeom prst="rect">
             <a:avLst/>
@@ -3611,7 +3611,7 @@
         <p:spPr>
           <a:xfrm>
             <a:off x="457200" y="365760"/>
-            <a:ext cx="8229600" cy="731520"/>
+            <a:ext cx="10972800" cy="731520"/>
           </a:xfrm>
           <a:prstGeom prst="rect">
             <a:avLst/>
@@ -3689,7 +3689,7 @@
         <p:spPr>
           <a:xfrm>
             <a:off x="640080" y="1371600"/>
-            <a:ext cx="7863840" cy="3657600"/>
+            <a:ext cx="10789920" cy="4572000"/>
           </a:xfrm>
           <a:prstGeom prst="rect">
             <a:avLst/>
@@ -3835,7 +3835,7 @@
         <p:spPr>
           <a:xfrm>
             <a:off x="0" y="0"/>
-            <a:ext cx="9144000" cy="6858000"/>
+            <a:ext cx="12191695" cy="6858000"/>
           </a:xfrm>
           <a:prstGeom prst="rect">
             <a:avLst/>
@@ -3878,7 +3878,7 @@
         <p:spPr>
           <a:xfrm>
             <a:off x="0" y="0"/>
-            <a:ext cx="9144000" cy="137160"/>
+            <a:ext cx="12191695" cy="137160"/>
           </a:xfrm>
           <a:prstGeom prst="rect">
             <a:avLst/>
@@ -3921,7 +3921,7 @@
         <p:spPr>
           <a:xfrm>
             <a:off x="457200" y="365760"/>
-            <a:ext cx="8229600" cy="731520"/>
+            <a:ext cx="10972800" cy="731520"/>
           </a:xfrm>
           <a:prstGeom prst="rect">
             <a:avLst/>
@@ -3999,7 +3999,7 @@
         <p:spPr>
           <a:xfrm>
             <a:off x="640080" y="1371600"/>
-            <a:ext cx="7863840" cy="3657600"/>
+            <a:ext cx="10789920" cy="4572000"/>
           </a:xfrm>
           <a:prstGeom prst="rect">
             <a:avLst/>
@@ -4190,7 +4190,7 @@
         <p:spPr>
           <a:xfrm>
             <a:off x="0" y="0"/>
-            <a:ext cx="9144000" cy="6858000"/>
+            <a:ext cx="12191695" cy="6858000"/>
           </a:xfrm>
           <a:prstGeom prst="rect">
             <a:avLst/>
@@ -4232,8 +4232,8 @@
         </p:nvSpPr>
         <p:spPr>
           <a:xfrm>
-            <a:off x="914400" y="2286000"/>
-            <a:ext cx="7315200" cy="914400"/>
+            <a:off x="914400" y="1828800"/>
+            <a:ext cx="10360152" cy="1371600"/>
           </a:xfrm>
           <a:prstGeom prst="rect">
             <a:avLst/>
@@ -4267,8 +4267,8 @@
         </p:nvSpPr>
         <p:spPr>
           <a:xfrm>
-            <a:off x="914400" y="3474720"/>
-            <a:ext cx="7315200" cy="548640"/>
+            <a:off x="914400" y="3657600"/>
+            <a:ext cx="10360152" cy="548640"/>
           </a:xfrm>
           <a:prstGeom prst="rect">
             <a:avLst/>
@@ -4302,8 +4302,8 @@
         </p:nvSpPr>
         <p:spPr>
           <a:xfrm>
-            <a:off x="914400" y="4114800"/>
-            <a:ext cx="7315200" cy="548640"/>
+            <a:off x="914400" y="4297680"/>
+            <a:ext cx="10360152" cy="548640"/>
           </a:xfrm>
           <a:prstGeom prst="rect">
             <a:avLst/>
@@ -4356,7 +4356,7 @@
         <p:spPr>
           <a:xfrm>
             <a:off x="0" y="0"/>
-            <a:ext cx="9144000" cy="6858000"/>
+            <a:ext cx="12191695" cy="6858000"/>
           </a:xfrm>
           <a:prstGeom prst="rect">
             <a:avLst/>
@@ -4399,7 +4399,7 @@
         <p:spPr>
           <a:xfrm>
             <a:off x="0" y="0"/>
-            <a:ext cx="9144000" cy="137160"/>
+            <a:ext cx="12191695" cy="137160"/>
           </a:xfrm>
           <a:prstGeom prst="rect">
             <a:avLst/>
@@ -4442,7 +4442,7 @@
         <p:spPr>
           <a:xfrm>
             <a:off x="457200" y="365760"/>
-            <a:ext cx="8229600" cy="731520"/>
+            <a:ext cx="10972800" cy="731520"/>
           </a:xfrm>
           <a:prstGeom prst="rect">
             <a:avLst/>
@@ -4520,7 +4520,7 @@
         <p:spPr>
           <a:xfrm>
             <a:off x="640080" y="1371600"/>
-            <a:ext cx="7863840" cy="3657600"/>
+            <a:ext cx="10789920" cy="4572000"/>
           </a:xfrm>
           <a:prstGeom prst="rect">
             <a:avLst/>
@@ -4711,7 +4711,7 @@
         <p:spPr>
           <a:xfrm>
             <a:off x="0" y="0"/>
-            <a:ext cx="9144000" cy="6858000"/>
+            <a:ext cx="12191695" cy="6858000"/>
           </a:xfrm>
           <a:prstGeom prst="rect">
             <a:avLst/>
@@ -4754,7 +4754,7 @@
         <p:spPr>
           <a:xfrm>
             <a:off x="0" y="0"/>
-            <a:ext cx="9144000" cy="137160"/>
+            <a:ext cx="12191695" cy="137160"/>
           </a:xfrm>
           <a:prstGeom prst="rect">
             <a:avLst/>
@@ -4797,7 +4797,7 @@
         <p:spPr>
           <a:xfrm>
             <a:off x="457200" y="365760"/>
-            <a:ext cx="8229600" cy="731520"/>
+            <a:ext cx="10972800" cy="731520"/>
           </a:xfrm>
           <a:prstGeom prst="rect">
             <a:avLst/>
@@ -4875,7 +4875,7 @@
         <p:spPr>
           <a:xfrm>
             <a:off x="640080" y="1371600"/>
-            <a:ext cx="7863840" cy="3657600"/>
+            <a:ext cx="10789920" cy="4572000"/>
           </a:xfrm>
           <a:prstGeom prst="rect">
             <a:avLst/>
@@ -4961,7 +4961,7 @@
         <p:spPr>
           <a:xfrm>
             <a:off x="0" y="0"/>
-            <a:ext cx="9144000" cy="6858000"/>
+            <a:ext cx="12191695" cy="6858000"/>
           </a:xfrm>
           <a:prstGeom prst="rect">
             <a:avLst/>
@@ -5004,7 +5004,7 @@
         <p:spPr>
           <a:xfrm>
             <a:off x="0" y="0"/>
-            <a:ext cx="9144000" cy="137160"/>
+            <a:ext cx="12191695" cy="137160"/>
           </a:xfrm>
           <a:prstGeom prst="rect">
             <a:avLst/>
@@ -5047,7 +5047,7 @@
         <p:spPr>
           <a:xfrm>
             <a:off x="457200" y="365760"/>
-            <a:ext cx="8229600" cy="731520"/>
+            <a:ext cx="10972800" cy="731520"/>
           </a:xfrm>
           <a:prstGeom prst="rect">
             <a:avLst/>
@@ -5125,7 +5125,7 @@
         <p:spPr>
           <a:xfrm>
             <a:off x="640080" y="1371600"/>
-            <a:ext cx="7863840" cy="3657600"/>
+            <a:ext cx="10789920" cy="4572000"/>
           </a:xfrm>
           <a:prstGeom prst="rect">
             <a:avLst/>
@@ -5211,7 +5211,7 @@
         <p:spPr>
           <a:xfrm>
             <a:off x="0" y="0"/>
-            <a:ext cx="9144000" cy="6858000"/>
+            <a:ext cx="12191695" cy="6858000"/>
           </a:xfrm>
           <a:prstGeom prst="rect">
             <a:avLst/>
@@ -5254,7 +5254,7 @@
         <p:spPr>
           <a:xfrm>
             <a:off x="0" y="0"/>
-            <a:ext cx="9144000" cy="137160"/>
+            <a:ext cx="12191695" cy="137160"/>
           </a:xfrm>
           <a:prstGeom prst="rect">
             <a:avLst/>
@@ -5297,7 +5297,7 @@
         <p:spPr>
           <a:xfrm>
             <a:off x="457200" y="365760"/>
-            <a:ext cx="8229600" cy="731520"/>
+            <a:ext cx="10972800" cy="731520"/>
           </a:xfrm>
           <a:prstGeom prst="rect">
             <a:avLst/>
@@ -5375,7 +5375,7 @@
         <p:spPr>
           <a:xfrm>
             <a:off x="640080" y="1371600"/>
-            <a:ext cx="7863840" cy="3657600"/>
+            <a:ext cx="10789920" cy="4572000"/>
           </a:xfrm>
           <a:prstGeom prst="rect">
             <a:avLst/>
@@ -5461,7 +5461,7 @@
         <p:spPr>
           <a:xfrm>
             <a:off x="0" y="0"/>
-            <a:ext cx="9144000" cy="6858000"/>
+            <a:ext cx="12191695" cy="6858000"/>
           </a:xfrm>
           <a:prstGeom prst="rect">
             <a:avLst/>
@@ -5504,7 +5504,7 @@
         <p:spPr>
           <a:xfrm>
             <a:off x="914400" y="2286000"/>
-            <a:ext cx="7315200" cy="914400"/>
+            <a:ext cx="10360152" cy="1371600"/>
           </a:xfrm>
           <a:prstGeom prst="rect">
             <a:avLst/>
@@ -5538,8 +5538,8 @@
         </p:nvSpPr>
         <p:spPr>
           <a:xfrm>
-            <a:off x="914400" y="3474720"/>
-            <a:ext cx="7315200" cy="914400"/>
+            <a:off x="914400" y="3840480"/>
+            <a:ext cx="10360152" cy="914400"/>
           </a:xfrm>
           <a:prstGeom prst="rect">
             <a:avLst/>
@@ -5592,7 +5592,7 @@
         <p:spPr>
           <a:xfrm>
             <a:off x="0" y="0"/>
-            <a:ext cx="9144000" cy="6858000"/>
+            <a:ext cx="12191695" cy="6858000"/>
           </a:xfrm>
           <a:prstGeom prst="rect">
             <a:avLst/>
@@ -5635,7 +5635,7 @@
         <p:spPr>
           <a:xfrm>
             <a:off x="0" y="0"/>
-            <a:ext cx="9144000" cy="137160"/>
+            <a:ext cx="12191695" cy="137160"/>
           </a:xfrm>
           <a:prstGeom prst="rect">
             <a:avLst/>
@@ -5678,7 +5678,7 @@
         <p:spPr>
           <a:xfrm>
             <a:off x="457200" y="365760"/>
-            <a:ext cx="8229600" cy="731520"/>
+            <a:ext cx="10972800" cy="731520"/>
           </a:xfrm>
           <a:prstGeom prst="rect">
             <a:avLst/>
@@ -5756,7 +5756,7 @@
         <p:spPr>
           <a:xfrm>
             <a:off x="640080" y="1371600"/>
-            <a:ext cx="7863840" cy="3657600"/>
+            <a:ext cx="10789920" cy="4572000"/>
           </a:xfrm>
           <a:prstGeom prst="rect">
             <a:avLst/>
@@ -5842,7 +5842,7 @@
         <p:spPr>
           <a:xfrm>
             <a:off x="0" y="0"/>
-            <a:ext cx="9144000" cy="6858000"/>
+            <a:ext cx="12191695" cy="6858000"/>
           </a:xfrm>
           <a:prstGeom prst="rect">
             <a:avLst/>
@@ -5885,7 +5885,7 @@
         <p:spPr>
           <a:xfrm>
             <a:off x="0" y="0"/>
-            <a:ext cx="9144000" cy="137160"/>
+            <a:ext cx="12191695" cy="137160"/>
           </a:xfrm>
           <a:prstGeom prst="rect">
             <a:avLst/>
@@ -5928,7 +5928,7 @@
         <p:spPr>
           <a:xfrm>
             <a:off x="457200" y="365760"/>
-            <a:ext cx="8229600" cy="731520"/>
+            <a:ext cx="10972800" cy="731520"/>
           </a:xfrm>
           <a:prstGeom prst="rect">
             <a:avLst/>
@@ -6006,7 +6006,7 @@
         <p:spPr>
           <a:xfrm>
             <a:off x="640080" y="1371600"/>
-            <a:ext cx="7863840" cy="3657600"/>
+            <a:ext cx="10789920" cy="4572000"/>
           </a:xfrm>
           <a:prstGeom prst="rect">
             <a:avLst/>
@@ -6107,7 +6107,7 @@
         <p:spPr>
           <a:xfrm>
             <a:off x="0" y="0"/>
-            <a:ext cx="9144000" cy="6858000"/>
+            <a:ext cx="12191695" cy="6858000"/>
           </a:xfrm>
           <a:prstGeom prst="rect">
             <a:avLst/>
@@ -6150,7 +6150,7 @@
         <p:spPr>
           <a:xfrm>
             <a:off x="0" y="0"/>
-            <a:ext cx="9144000" cy="137160"/>
+            <a:ext cx="12191695" cy="137160"/>
           </a:xfrm>
           <a:prstGeom prst="rect">
             <a:avLst/>
@@ -6193,7 +6193,7 @@
         <p:spPr>
           <a:xfrm>
             <a:off x="457200" y="365760"/>
-            <a:ext cx="8229600" cy="731520"/>
+            <a:ext cx="10972800" cy="731520"/>
           </a:xfrm>
           <a:prstGeom prst="rect">
             <a:avLst/>
@@ -6271,7 +6271,7 @@
         <p:spPr>
           <a:xfrm>
             <a:off x="640080" y="1371600"/>
-            <a:ext cx="7863840" cy="3657600"/>
+            <a:ext cx="10789920" cy="4572000"/>
           </a:xfrm>
           <a:prstGeom prst="rect">
             <a:avLst/>
